--- a/PPTs/Ch6_ARM_Control_Flow_Exercises.pptx
+++ b/PPTs/Ch6_ARM_Control_Flow_Exercises.pptx
@@ -143,156 +143,37 @@
 </p:presentation>
 </file>
 
+<file path=ppt/revisionInfo.xml><?xml version="1.0" encoding="utf-8"?>
+<p1510:revInfo xmlns:a="http://schemas.openxmlformats.org/drawingml/2006/main" xmlns:r="http://schemas.openxmlformats.org/officeDocument/2006/relationships" xmlns:p1510="http://schemas.microsoft.com/office/powerpoint/2015/10/main">
+  <p1510:revLst>
+    <p1510:client id="{755520B2-524F-4311-B7DF-3C495128E1DE}" v="1" dt="2025-11-12T01:04:15.100"/>
+  </p1510:revLst>
+</p1510:revInfo>
+</file>
+
 <file path=ppt/changesInfos/changesInfo1.xml><?xml version="1.0" encoding="utf-8"?>
 <pc:chgInfo xmlns:a="http://schemas.openxmlformats.org/drawingml/2006/main" xmlns:r="http://schemas.openxmlformats.org/officeDocument/2006/relationships" xmlns:ac="http://schemas.microsoft.com/office/drawing/2013/main/command" xmlns:pc="http://schemas.microsoft.com/office/powerpoint/2013/main/command">
   <pc:docChgLst>
     <pc:chgData name="Zonghua Gu" userId="9a7e1853e1951ef5" providerId="LiveId" clId="{CF1FAA12-072C-4ED5-BA76-0FFFAEFDB88A}"/>
     <pc:docChg chg="delSld modSld">
-      <pc:chgData name="Zonghua Gu" userId="9a7e1853e1951ef5" providerId="LiveId" clId="{CF1FAA12-072C-4ED5-BA76-0FFFAEFDB88A}" dt="2025-09-28T21:29:01.797" v="17" actId="1076"/>
+      <pc:chgData name="Zonghua Gu" userId="9a7e1853e1951ef5" providerId="LiveId" clId="{CF1FAA12-072C-4ED5-BA76-0FFFAEFDB88A}" dt="2025-11-12T01:04:15.100" v="19"/>
       <pc:docMkLst>
         <pc:docMk/>
       </pc:docMkLst>
       <pc:sldChg chg="modSp mod">
-        <pc:chgData name="Zonghua Gu" userId="9a7e1853e1951ef5" providerId="LiveId" clId="{CF1FAA12-072C-4ED5-BA76-0FFFAEFDB88A}" dt="2025-09-28T19:30:40.829" v="0" actId="20577"/>
+        <pc:chgData name="Zonghua Gu" userId="9a7e1853e1951ef5" providerId="LiveId" clId="{CF1FAA12-072C-4ED5-BA76-0FFFAEFDB88A}" dt="2025-11-12T01:04:15.100" v="19"/>
         <pc:sldMkLst>
           <pc:docMk/>
           <pc:sldMk cId="1683281344" sldId="256"/>
         </pc:sldMkLst>
         <pc:spChg chg="mod">
-          <ac:chgData name="Zonghua Gu" userId="9a7e1853e1951ef5" providerId="LiveId" clId="{CF1FAA12-072C-4ED5-BA76-0FFFAEFDB88A}" dt="2025-09-28T19:30:40.829" v="0" actId="20577"/>
+          <ac:chgData name="Zonghua Gu" userId="9a7e1853e1951ef5" providerId="LiveId" clId="{CF1FAA12-072C-4ED5-BA76-0FFFAEFDB88A}" dt="2025-11-12T01:04:15.100" v="19"/>
           <ac:spMkLst>
             <pc:docMk/>
             <pc:sldMk cId="1683281344" sldId="256"/>
             <ac:spMk id="6" creationId="{00000000-0000-0000-0000-000000000000}"/>
           </ac:spMkLst>
         </pc:spChg>
-      </pc:sldChg>
-      <pc:sldChg chg="del">
-        <pc:chgData name="Zonghua Gu" userId="9a7e1853e1951ef5" providerId="LiveId" clId="{CF1FAA12-072C-4ED5-BA76-0FFFAEFDB88A}" dt="2025-09-28T19:31:00.657" v="14" actId="47"/>
-        <pc:sldMkLst>
-          <pc:docMk/>
-          <pc:sldMk cId="2535127592" sldId="287"/>
-        </pc:sldMkLst>
-      </pc:sldChg>
-      <pc:sldChg chg="del">
-        <pc:chgData name="Zonghua Gu" userId="9a7e1853e1951ef5" providerId="LiveId" clId="{CF1FAA12-072C-4ED5-BA76-0FFFAEFDB88A}" dt="2025-09-28T19:30:45.979" v="2" actId="47"/>
-        <pc:sldMkLst>
-          <pc:docMk/>
-          <pc:sldMk cId="188395404" sldId="353"/>
-        </pc:sldMkLst>
-      </pc:sldChg>
-      <pc:sldChg chg="del">
-        <pc:chgData name="Zonghua Gu" userId="9a7e1853e1951ef5" providerId="LiveId" clId="{CF1FAA12-072C-4ED5-BA76-0FFFAEFDB88A}" dt="2025-09-28T19:30:46.906" v="3" actId="47"/>
-        <pc:sldMkLst>
-          <pc:docMk/>
-          <pc:sldMk cId="3013293955" sldId="355"/>
-        </pc:sldMkLst>
-      </pc:sldChg>
-      <pc:sldChg chg="del">
-        <pc:chgData name="Zonghua Gu" userId="9a7e1853e1951ef5" providerId="LiveId" clId="{CF1FAA12-072C-4ED5-BA76-0FFFAEFDB88A}" dt="2025-09-28T19:30:48.304" v="4" actId="47"/>
-        <pc:sldMkLst>
-          <pc:docMk/>
-          <pc:sldMk cId="2876358127" sldId="356"/>
-        </pc:sldMkLst>
-      </pc:sldChg>
-      <pc:sldChg chg="del">
-        <pc:chgData name="Zonghua Gu" userId="9a7e1853e1951ef5" providerId="LiveId" clId="{CF1FAA12-072C-4ED5-BA76-0FFFAEFDB88A}" dt="2025-09-28T19:31:01.610" v="15" actId="47"/>
-        <pc:sldMkLst>
-          <pc:docMk/>
-          <pc:sldMk cId="3066637480" sldId="358"/>
-        </pc:sldMkLst>
-      </pc:sldChg>
-      <pc:sldChg chg="del">
-        <pc:chgData name="Zonghua Gu" userId="9a7e1853e1951ef5" providerId="LiveId" clId="{CF1FAA12-072C-4ED5-BA76-0FFFAEFDB88A}" dt="2025-09-28T19:31:02.351" v="16" actId="47"/>
-        <pc:sldMkLst>
-          <pc:docMk/>
-          <pc:sldMk cId="1016872391" sldId="360"/>
-        </pc:sldMkLst>
-      </pc:sldChg>
-      <pc:sldChg chg="del">
-        <pc:chgData name="Zonghua Gu" userId="9a7e1853e1951ef5" providerId="LiveId" clId="{CF1FAA12-072C-4ED5-BA76-0FFFAEFDB88A}" dt="2025-09-28T19:30:55.904" v="10" actId="47"/>
-        <pc:sldMkLst>
-          <pc:docMk/>
-          <pc:sldMk cId="1907292877" sldId="362"/>
-        </pc:sldMkLst>
-      </pc:sldChg>
-      <pc:sldChg chg="del">
-        <pc:chgData name="Zonghua Gu" userId="9a7e1853e1951ef5" providerId="LiveId" clId="{CF1FAA12-072C-4ED5-BA76-0FFFAEFDB88A}" dt="2025-09-28T19:30:56.591" v="11" actId="47"/>
-        <pc:sldMkLst>
-          <pc:docMk/>
-          <pc:sldMk cId="2698422353" sldId="364"/>
-        </pc:sldMkLst>
-      </pc:sldChg>
-      <pc:sldChg chg="modSp mod">
-        <pc:chgData name="Zonghua Gu" userId="9a7e1853e1951ef5" providerId="LiveId" clId="{CF1FAA12-072C-4ED5-BA76-0FFFAEFDB88A}" dt="2025-09-28T21:29:01.797" v="17" actId="1076"/>
-        <pc:sldMkLst>
-          <pc:docMk/>
-          <pc:sldMk cId="3022176175" sldId="366"/>
-        </pc:sldMkLst>
-        <pc:spChg chg="mod">
-          <ac:chgData name="Zonghua Gu" userId="9a7e1853e1951ef5" providerId="LiveId" clId="{CF1FAA12-072C-4ED5-BA76-0FFFAEFDB88A}" dt="2025-09-28T21:29:01.797" v="17" actId="1076"/>
-          <ac:spMkLst>
-            <pc:docMk/>
-            <pc:sldMk cId="3022176175" sldId="366"/>
-            <ac:spMk id="3" creationId="{E7D41462-9020-C1BE-FC22-4828849CCA2B}"/>
-          </ac:spMkLst>
-        </pc:spChg>
-      </pc:sldChg>
-      <pc:sldChg chg="del">
-        <pc:chgData name="Zonghua Gu" userId="9a7e1853e1951ef5" providerId="LiveId" clId="{CF1FAA12-072C-4ED5-BA76-0FFFAEFDB88A}" dt="2025-09-28T19:30:57.347" v="12" actId="47"/>
-        <pc:sldMkLst>
-          <pc:docMk/>
-          <pc:sldMk cId="3866648740" sldId="370"/>
-        </pc:sldMkLst>
-      </pc:sldChg>
-      <pc:sldChg chg="del">
-        <pc:chgData name="Zonghua Gu" userId="9a7e1853e1951ef5" providerId="LiveId" clId="{CF1FAA12-072C-4ED5-BA76-0FFFAEFDB88A}" dt="2025-09-28T19:30:49.021" v="5" actId="47"/>
-        <pc:sldMkLst>
-          <pc:docMk/>
-          <pc:sldMk cId="3582392412" sldId="371"/>
-        </pc:sldMkLst>
-      </pc:sldChg>
-      <pc:sldChg chg="del">
-        <pc:chgData name="Zonghua Gu" userId="9a7e1853e1951ef5" providerId="LiveId" clId="{CF1FAA12-072C-4ED5-BA76-0FFFAEFDB88A}" dt="2025-09-28T19:30:58.263" v="13" actId="47"/>
-        <pc:sldMkLst>
-          <pc:docMk/>
-          <pc:sldMk cId="234389551" sldId="373"/>
-        </pc:sldMkLst>
-      </pc:sldChg>
-      <pc:sldChg chg="del">
-        <pc:chgData name="Zonghua Gu" userId="9a7e1853e1951ef5" providerId="LiveId" clId="{CF1FAA12-072C-4ED5-BA76-0FFFAEFDB88A}" dt="2025-09-28T19:30:51.222" v="7" actId="47"/>
-        <pc:sldMkLst>
-          <pc:docMk/>
-          <pc:sldMk cId="824643333" sldId="374"/>
-        </pc:sldMkLst>
-      </pc:sldChg>
-      <pc:sldChg chg="del">
-        <pc:chgData name="Zonghua Gu" userId="9a7e1853e1951ef5" providerId="LiveId" clId="{CF1FAA12-072C-4ED5-BA76-0FFFAEFDB88A}" dt="2025-09-28T19:30:52.555" v="8" actId="47"/>
-        <pc:sldMkLst>
-          <pc:docMk/>
-          <pc:sldMk cId="3558794685" sldId="379"/>
-        </pc:sldMkLst>
-      </pc:sldChg>
-      <pc:sldChg chg="del">
-        <pc:chgData name="Zonghua Gu" userId="9a7e1853e1951ef5" providerId="LiveId" clId="{CF1FAA12-072C-4ED5-BA76-0FFFAEFDB88A}" dt="2025-09-28T19:30:50.290" v="6" actId="47"/>
-        <pc:sldMkLst>
-          <pc:docMk/>
-          <pc:sldMk cId="3938986292" sldId="381"/>
-        </pc:sldMkLst>
-      </pc:sldChg>
-      <pc:sldChg chg="del">
-        <pc:chgData name="Zonghua Gu" userId="9a7e1853e1951ef5" providerId="LiveId" clId="{CF1FAA12-072C-4ED5-BA76-0FFFAEFDB88A}" dt="2025-09-28T19:30:44.962" v="1" actId="47"/>
-        <pc:sldMkLst>
-          <pc:docMk/>
-          <pc:sldMk cId="3010226585" sldId="383"/>
-        </pc:sldMkLst>
-      </pc:sldChg>
-      <pc:sldChg chg="del">
-        <pc:chgData name="Zonghua Gu" userId="9a7e1853e1951ef5" providerId="LiveId" clId="{CF1FAA12-072C-4ED5-BA76-0FFFAEFDB88A}" dt="2025-09-28T19:30:55.165" v="9" actId="47"/>
-        <pc:sldMkLst>
-          <pc:docMk/>
-          <pc:sldMk cId="3700392889" sldId="386"/>
-        </pc:sldMkLst>
       </pc:sldChg>
     </pc:docChg>
   </pc:docChgLst>
@@ -382,7 +263,7 @@
             <a:fld id="{2AEAFE1F-9E52-45C8-9793-E819F0044A1C}" type="datetimeFigureOut">
               <a:rPr lang="en-US" smtClean="0"/>
               <a:pPr/>
-              <a:t>9/28/2025</a:t>
+              <a:t>11/11/2025</a:t>
             </a:fld>
             <a:endParaRPr lang="en-US"/>
           </a:p>
@@ -1889,7 +1770,7 @@
             <a:fld id="{2E26774B-6488-4259-9342-6CBDB2BFD4E4}" type="datetime1">
               <a:rPr lang="en-US" smtClean="0"/>
               <a:pPr eaLnBrk="1" latinLnBrk="0" hangingPunct="1"/>
-              <a:t>9/28/2025</a:t>
+              <a:t>11/11/2025</a:t>
             </a:fld>
             <a:endParaRPr lang="en-US" sz="1600" dirty="0"/>
           </a:p>
@@ -2250,7 +2131,7 @@
             <a:fld id="{9B2E7711-0BE3-4AFC-959B-CB5C31A7AE48}" type="datetime1">
               <a:rPr lang="en-US" smtClean="0"/>
               <a:pPr eaLnBrk="1" latinLnBrk="0" hangingPunct="1"/>
-              <a:t>9/28/2025</a:t>
+              <a:t>11/11/2025</a:t>
             </a:fld>
             <a:endParaRPr lang="en-US"/>
           </a:p>
@@ -2427,7 +2308,7 @@
             <a:fld id="{825AAB62-A572-4E37-B772-B4A75ADE0B18}" type="datetime1">
               <a:rPr lang="en-US" smtClean="0"/>
               <a:pPr eaLnBrk="1" latinLnBrk="0" hangingPunct="1"/>
-              <a:t>9/28/2025</a:t>
+              <a:t>11/11/2025</a:t>
             </a:fld>
             <a:endParaRPr lang="en-US"/>
           </a:p>
@@ -2664,7 +2545,7 @@
             <a:fld id="{B0F52420-10F8-488E-969A-A9BE388BE9C4}" type="datetime1">
               <a:rPr lang="en-US" smtClean="0"/>
               <a:pPr eaLnBrk="1" latinLnBrk="0" hangingPunct="1"/>
-              <a:t>9/28/2025</a:t>
+              <a:t>11/11/2025</a:t>
             </a:fld>
             <a:endParaRPr lang="en-US" dirty="0"/>
           </a:p>
@@ -2935,7 +2816,7 @@
             <a:fld id="{96E96F24-58CF-47DA-907C-A9CD6353E425}" type="datetime1">
               <a:rPr lang="en-US" smtClean="0"/>
               <a:pPr eaLnBrk="1" latinLnBrk="0" hangingPunct="1"/>
-              <a:t>9/28/2025</a:t>
+              <a:t>11/11/2025</a:t>
             </a:fld>
             <a:endParaRPr lang="en-US" dirty="0"/>
           </a:p>
@@ -3157,7 +3038,7 @@
             <a:fld id="{53AE4463-726A-4A35-9F46-98893432A3F9}" type="datetime1">
               <a:rPr lang="en-US" smtClean="0"/>
               <a:pPr eaLnBrk="1" latinLnBrk="0" hangingPunct="1"/>
-              <a:t>9/28/2025</a:t>
+              <a:t>11/11/2025</a:t>
             </a:fld>
             <a:endParaRPr lang="en-US"/>
           </a:p>
@@ -3511,7 +3392,7 @@
             <a:fld id="{FDF404D0-E306-4E90-90E3-E44D26246FFC}" type="datetime1">
               <a:rPr lang="en-US" smtClean="0"/>
               <a:pPr eaLnBrk="1" latinLnBrk="0" hangingPunct="1"/>
-              <a:t>9/28/2025</a:t>
+              <a:t>11/11/2025</a:t>
             </a:fld>
             <a:endParaRPr lang="en-US"/>
           </a:p>
@@ -3745,7 +3626,7 @@
             <a:fld id="{1485DA14-76F0-4D93-83FB-7878C79A1986}" type="datetime1">
               <a:rPr lang="en-US" smtClean="0"/>
               <a:pPr eaLnBrk="1" latinLnBrk="0" hangingPunct="1"/>
-              <a:t>9/28/2025</a:t>
+              <a:t>11/11/2025</a:t>
             </a:fld>
             <a:endParaRPr lang="en-US"/>
           </a:p>
@@ -3888,7 +3769,7 @@
             <a:fld id="{A15E552D-49E1-496B-B79C-E100986B8B5F}" type="datetime1">
               <a:rPr lang="en-US" smtClean="0"/>
               <a:pPr eaLnBrk="1" latinLnBrk="0" hangingPunct="1"/>
-              <a:t>9/28/2025</a:t>
+              <a:t>11/11/2025</a:t>
             </a:fld>
             <a:endParaRPr lang="en-US"/>
           </a:p>
@@ -4167,7 +4048,7 @@
             <a:fld id="{CEC72505-1551-4A98-97CD-F520B07184AD}" type="datetime1">
               <a:rPr lang="en-US" smtClean="0"/>
               <a:pPr eaLnBrk="1" latinLnBrk="0" hangingPunct="1"/>
-              <a:t>9/28/2025</a:t>
+              <a:t>11/11/2025</a:t>
             </a:fld>
             <a:endParaRPr lang="en-US"/>
           </a:p>
@@ -4575,7 +4456,7 @@
             <a:fld id="{7218F47B-BA16-4F20-B5BA-73F598D94B51}" type="datetime1">
               <a:rPr lang="en-US" smtClean="0"/>
               <a:pPr eaLnBrk="1" latinLnBrk="0" hangingPunct="1"/>
-              <a:t>9/28/2025</a:t>
+              <a:t>11/11/2025</a:t>
             </a:fld>
             <a:endParaRPr lang="en-US"/>
           </a:p>
@@ -4914,7 +4795,7 @@
             <a:fld id="{4F3CB514-9CA6-4E48-9463-A430D31CFDE3}" type="datetime1">
               <a:rPr lang="en-US" smtClean="0"/>
               <a:pPr eaLnBrk="1" latinLnBrk="0" hangingPunct="1"/>
-              <a:t>9/28/2025</a:t>
+              <a:t>11/11/2025</a:t>
             </a:fld>
             <a:endParaRPr lang="en-US" sz="1400" dirty="0">
               <a:solidFill>
@@ -5547,8 +5428,8 @@
         </p:nvSpPr>
         <p:spPr>
           <a:xfrm>
-            <a:off x="4413019" y="1828800"/>
-            <a:ext cx="3856376" cy="1200329"/>
+            <a:off x="4413082" y="1828800"/>
+            <a:ext cx="3856313" cy="1200329"/>
           </a:xfrm>
           <a:prstGeom prst="rect">
             <a:avLst/>
@@ -5574,12 +5455,20 @@
           <a:p>
             <a:pPr algn="r"/>
             <a:r>
+              <a:rPr lang="en-US" sz="2400" b="1">
+                <a:solidFill>
+                  <a:srgbClr val="C00000"/>
+                </a:solidFill>
+              </a:rPr>
+              <a:t>Control Flow in </a:t>
+            </a:r>
+            <a:r>
               <a:rPr lang="en-US" sz="2400" b="1" dirty="0">
                 <a:solidFill>
                   <a:srgbClr val="C00000"/>
                 </a:solidFill>
               </a:rPr>
-              <a:t>Flow Control in Assembly</a:t>
+              <a:t>Assembly</a:t>
             </a:r>
           </a:p>
           <a:p>

--- a/PPTs/Ch6_ARM_Control_Flow_Exercises.pptx
+++ b/PPTs/Ch6_ARM_Control_Flow_Exercises.pptx
@@ -5,7 +5,7 @@
     <p:sldMasterId id="2147483660" r:id="rId1"/>
   </p:sldMasterIdLst>
   <p:notesMasterIdLst>
-    <p:notesMasterId r:id="rId20"/>
+    <p:notesMasterId r:id="rId21"/>
   </p:notesMasterIdLst>
   <p:sldIdLst>
     <p:sldId id="256" r:id="rId2"/>
@@ -20,12 +20,13 @@
     <p:sldId id="376" r:id="rId11"/>
     <p:sldId id="361" r:id="rId12"/>
     <p:sldId id="363" r:id="rId13"/>
-    <p:sldId id="368" r:id="rId14"/>
-    <p:sldId id="372" r:id="rId15"/>
-    <p:sldId id="366" r:id="rId16"/>
-    <p:sldId id="367" r:id="rId17"/>
-    <p:sldId id="357" r:id="rId18"/>
-    <p:sldId id="359" r:id="rId19"/>
+    <p:sldId id="388" r:id="rId14"/>
+    <p:sldId id="368" r:id="rId15"/>
+    <p:sldId id="372" r:id="rId16"/>
+    <p:sldId id="366" r:id="rId17"/>
+    <p:sldId id="367" r:id="rId18"/>
+    <p:sldId id="357" r:id="rId19"/>
+    <p:sldId id="359" r:id="rId20"/>
   </p:sldIdLst>
   <p:sldSz cx="9144000" cy="6858000" type="screen4x3"/>
   <p:notesSz cx="6950075" cy="9236075"/>
@@ -146,7 +147,7 @@
 <file path=ppt/revisionInfo.xml><?xml version="1.0" encoding="utf-8"?>
 <p1510:revInfo xmlns:a="http://schemas.openxmlformats.org/drawingml/2006/main" xmlns:r="http://schemas.openxmlformats.org/officeDocument/2006/relationships" xmlns:p1510="http://schemas.microsoft.com/office/powerpoint/2015/10/main">
   <p1510:revLst>
-    <p1510:client id="{755520B2-524F-4311-B7DF-3C495128E1DE}" v="1" dt="2025-11-12T01:04:15.100"/>
+    <p1510:client id="{755520B2-524F-4311-B7DF-3C495128E1DE}" v="2" dt="2025-11-13T22:55:41.384"/>
   </p1510:revLst>
 </p1510:revInfo>
 </file>
@@ -155,8 +156,8 @@
 <pc:chgInfo xmlns:a="http://schemas.openxmlformats.org/drawingml/2006/main" xmlns:r="http://schemas.openxmlformats.org/officeDocument/2006/relationships" xmlns:ac="http://schemas.microsoft.com/office/drawing/2013/main/command" xmlns:pc="http://schemas.microsoft.com/office/powerpoint/2013/main/command">
   <pc:docChgLst>
     <pc:chgData name="Zonghua Gu" userId="9a7e1853e1951ef5" providerId="LiveId" clId="{CF1FAA12-072C-4ED5-BA76-0FFFAEFDB88A}"/>
-    <pc:docChg chg="delSld modSld">
-      <pc:chgData name="Zonghua Gu" userId="9a7e1853e1951ef5" providerId="LiveId" clId="{CF1FAA12-072C-4ED5-BA76-0FFFAEFDB88A}" dt="2025-11-12T01:04:15.100" v="19"/>
+    <pc:docChg chg="addSld delSld modSld">
+      <pc:chgData name="Zonghua Gu" userId="9a7e1853e1951ef5" providerId="LiveId" clId="{CF1FAA12-072C-4ED5-BA76-0FFFAEFDB88A}" dt="2025-11-13T22:55:43.072" v="22" actId="47"/>
       <pc:docMkLst>
         <pc:docMk/>
       </pc:docMkLst>
@@ -174,6 +175,20 @@
             <ac:spMk id="6" creationId="{00000000-0000-0000-0000-000000000000}"/>
           </ac:spMkLst>
         </pc:spChg>
+      </pc:sldChg>
+      <pc:sldChg chg="new del">
+        <pc:chgData name="Zonghua Gu" userId="9a7e1853e1951ef5" providerId="LiveId" clId="{CF1FAA12-072C-4ED5-BA76-0FFFAEFDB88A}" dt="2025-11-13T22:55:43.072" v="22" actId="47"/>
+        <pc:sldMkLst>
+          <pc:docMk/>
+          <pc:sldMk cId="1606220680" sldId="385"/>
+        </pc:sldMkLst>
+      </pc:sldChg>
+      <pc:sldChg chg="add">
+        <pc:chgData name="Zonghua Gu" userId="9a7e1853e1951ef5" providerId="LiveId" clId="{CF1FAA12-072C-4ED5-BA76-0FFFAEFDB88A}" dt="2025-11-13T22:55:41.384" v="21"/>
+        <pc:sldMkLst>
+          <pc:docMk/>
+          <pc:sldMk cId="2076517291" sldId="388"/>
+        </pc:sldMkLst>
       </pc:sldChg>
     </pc:docChg>
   </pc:docChgLst>
@@ -263,7 +278,7 @@
             <a:fld id="{2AEAFE1F-9E52-45C8-9793-E819F0044A1C}" type="datetimeFigureOut">
               <a:rPr lang="en-US" smtClean="0"/>
               <a:pPr/>
-              <a:t>11/11/2025</a:t>
+              <a:t>11/13/2025</a:t>
             </a:fld>
             <a:endParaRPr lang="en-US"/>
           </a:p>
@@ -1401,6 +1416,123 @@
   <p:cSld>
     <p:spTree>
       <p:nvGrpSpPr>
+        <p:cNvPr id="1" name="">
+          <a:extLst>
+            <a:ext uri="{FF2B5EF4-FFF2-40B4-BE49-F238E27FC236}">
+              <a16:creationId xmlns:a16="http://schemas.microsoft.com/office/drawing/2014/main" id="{37A5862C-E5A2-BA8F-385A-253A9E8D46F0}"/>
+            </a:ext>
+          </a:extLst>
+        </p:cNvPr>
+        <p:cNvGrpSpPr/>
+        <p:nvPr/>
+      </p:nvGrpSpPr>
+      <p:grpSpPr>
+        <a:xfrm>
+          <a:off x="0" y="0"/>
+          <a:ext cx="0" cy="0"/>
+          <a:chOff x="0" y="0"/>
+          <a:chExt cx="0" cy="0"/>
+        </a:xfrm>
+      </p:grpSpPr>
+      <p:sp>
+        <p:nvSpPr>
+          <p:cNvPr id="2" name="Slide Image Placeholder 1">
+            <a:extLst>
+              <a:ext uri="{FF2B5EF4-FFF2-40B4-BE49-F238E27FC236}">
+                <a16:creationId xmlns:a16="http://schemas.microsoft.com/office/drawing/2014/main" id="{8B00B468-CEBE-6E74-94E0-101106D7FB39}"/>
+              </a:ext>
+            </a:extLst>
+          </p:cNvPr>
+          <p:cNvSpPr>
+            <a:spLocks noGrp="1" noRot="1" noChangeAspect="1"/>
+          </p:cNvSpPr>
+          <p:nvPr>
+            <p:ph type="sldImg"/>
+          </p:nvPr>
+        </p:nvSpPr>
+        <p:spPr/>
+      </p:sp>
+      <p:sp>
+        <p:nvSpPr>
+          <p:cNvPr id="3" name="Notes Placeholder 2">
+            <a:extLst>
+              <a:ext uri="{FF2B5EF4-FFF2-40B4-BE49-F238E27FC236}">
+                <a16:creationId xmlns:a16="http://schemas.microsoft.com/office/drawing/2014/main" id="{E3A5F83B-79B0-55F5-1F44-B30AEACB7EA7}"/>
+              </a:ext>
+            </a:extLst>
+          </p:cNvPr>
+          <p:cNvSpPr>
+            <a:spLocks noGrp="1"/>
+          </p:cNvSpPr>
+          <p:nvPr>
+            <p:ph type="body" idx="1"/>
+          </p:nvPr>
+        </p:nvSpPr>
+        <p:spPr/>
+        <p:txBody>
+          <a:bodyPr/>
+          <a:lstStyle/>
+          <a:p>
+            <a:r>
+              <a:rPr lang="pt-BR" sz="1200" i="0" dirty="0">
+                <a:effectLst/>
+                <a:latin typeface="Consolas" panose="020B0609020204030204" pitchFamily="49" charset="0"/>
+                <a:cs typeface="Consolas" panose="020B0609020204030204" pitchFamily="49" charset="0"/>
+              </a:rPr>
+              <a:t> bx lr</a:t>
+            </a:r>
+            <a:endParaRPr lang="en-US" dirty="0"/>
+          </a:p>
+        </p:txBody>
+      </p:sp>
+      <p:sp>
+        <p:nvSpPr>
+          <p:cNvPr id="4" name="Slide Number Placeholder 3">
+            <a:extLst>
+              <a:ext uri="{FF2B5EF4-FFF2-40B4-BE49-F238E27FC236}">
+                <a16:creationId xmlns:a16="http://schemas.microsoft.com/office/drawing/2014/main" id="{1B5464B3-1AF1-2B17-D44B-E2C4306384DA}"/>
+              </a:ext>
+            </a:extLst>
+          </p:cNvPr>
+          <p:cNvSpPr>
+            <a:spLocks noGrp="1"/>
+          </p:cNvSpPr>
+          <p:nvPr>
+            <p:ph type="sldNum" sz="quarter" idx="5"/>
+          </p:nvPr>
+        </p:nvSpPr>
+        <p:spPr/>
+        <p:txBody>
+          <a:bodyPr/>
+          <a:lstStyle/>
+          <a:p>
+            <a:fld id="{2D71AD5F-E36F-46B9-A99B-7B025244359D}" type="slidenum">
+              <a:rPr lang="en-US" smtClean="0"/>
+              <a:pPr/>
+              <a:t>13</a:t>
+            </a:fld>
+            <a:endParaRPr lang="en-US"/>
+          </a:p>
+        </p:txBody>
+      </p:sp>
+    </p:spTree>
+    <p:extLst>
+      <p:ext uri="{BB962C8B-B14F-4D97-AF65-F5344CB8AC3E}">
+        <p14:creationId xmlns:p14="http://schemas.microsoft.com/office/powerpoint/2010/main" val="1160230142"/>
+      </p:ext>
+    </p:extLst>
+  </p:cSld>
+  <p:clrMapOvr>
+    <a:masterClrMapping/>
+  </p:clrMapOvr>
+</p:notes>
+</file>
+
+<file path=ppt/notesSlides/notesSlide7.xml><?xml version="1.0" encoding="utf-8"?>
+<p:notes xmlns:a="http://schemas.openxmlformats.org/drawingml/2006/main" xmlns:r="http://schemas.openxmlformats.org/officeDocument/2006/relationships" xmlns:p="http://schemas.openxmlformats.org/presentationml/2006/main">
+  <p:cSld>
+    <p:spTree>
+      <p:nvGrpSpPr>
         <p:cNvPr id="1" name=""/>
         <p:cNvGrpSpPr/>
         <p:nvPr/>
@@ -1495,7 +1627,7 @@
 </p:notes>
 </file>
 
-<file path=ppt/notesSlides/notesSlide7.xml><?xml version="1.0" encoding="utf-8"?>
+<file path=ppt/notesSlides/notesSlide8.xml><?xml version="1.0" encoding="utf-8"?>
 <p:notes xmlns:a="http://schemas.openxmlformats.org/drawingml/2006/main" xmlns:r="http://schemas.openxmlformats.org/officeDocument/2006/relationships" xmlns:p="http://schemas.openxmlformats.org/presentationml/2006/main">
   <p:cSld>
     <p:spTree>
@@ -1608,7 +1740,7 @@
             <a:fld id="{2D71AD5F-E36F-46B9-A99B-7B025244359D}" type="slidenum">
               <a:rPr lang="en-US" smtClean="0"/>
               <a:pPr/>
-              <a:t>16</a:t>
+              <a:t>17</a:t>
             </a:fld>
             <a:endParaRPr lang="en-US"/>
           </a:p>
@@ -1770,7 +1902,7 @@
             <a:fld id="{2E26774B-6488-4259-9342-6CBDB2BFD4E4}" type="datetime1">
               <a:rPr lang="en-US" smtClean="0"/>
               <a:pPr eaLnBrk="1" latinLnBrk="0" hangingPunct="1"/>
-              <a:t>11/11/2025</a:t>
+              <a:t>11/13/2025</a:t>
             </a:fld>
             <a:endParaRPr lang="en-US" sz="1600" dirty="0"/>
           </a:p>
@@ -2131,7 +2263,7 @@
             <a:fld id="{9B2E7711-0BE3-4AFC-959B-CB5C31A7AE48}" type="datetime1">
               <a:rPr lang="en-US" smtClean="0"/>
               <a:pPr eaLnBrk="1" latinLnBrk="0" hangingPunct="1"/>
-              <a:t>11/11/2025</a:t>
+              <a:t>11/13/2025</a:t>
             </a:fld>
             <a:endParaRPr lang="en-US"/>
           </a:p>
@@ -2308,7 +2440,7 @@
             <a:fld id="{825AAB62-A572-4E37-B772-B4A75ADE0B18}" type="datetime1">
               <a:rPr lang="en-US" smtClean="0"/>
               <a:pPr eaLnBrk="1" latinLnBrk="0" hangingPunct="1"/>
-              <a:t>11/11/2025</a:t>
+              <a:t>11/13/2025</a:t>
             </a:fld>
             <a:endParaRPr lang="en-US"/>
           </a:p>
@@ -2545,7 +2677,7 @@
             <a:fld id="{B0F52420-10F8-488E-969A-A9BE388BE9C4}" type="datetime1">
               <a:rPr lang="en-US" smtClean="0"/>
               <a:pPr eaLnBrk="1" latinLnBrk="0" hangingPunct="1"/>
-              <a:t>11/11/2025</a:t>
+              <a:t>11/13/2025</a:t>
             </a:fld>
             <a:endParaRPr lang="en-US" dirty="0"/>
           </a:p>
@@ -2816,7 +2948,7 @@
             <a:fld id="{96E96F24-58CF-47DA-907C-A9CD6353E425}" type="datetime1">
               <a:rPr lang="en-US" smtClean="0"/>
               <a:pPr eaLnBrk="1" latinLnBrk="0" hangingPunct="1"/>
-              <a:t>11/11/2025</a:t>
+              <a:t>11/13/2025</a:t>
             </a:fld>
             <a:endParaRPr lang="en-US" dirty="0"/>
           </a:p>
@@ -3038,7 +3170,7 @@
             <a:fld id="{53AE4463-726A-4A35-9F46-98893432A3F9}" type="datetime1">
               <a:rPr lang="en-US" smtClean="0"/>
               <a:pPr eaLnBrk="1" latinLnBrk="0" hangingPunct="1"/>
-              <a:t>11/11/2025</a:t>
+              <a:t>11/13/2025</a:t>
             </a:fld>
             <a:endParaRPr lang="en-US"/>
           </a:p>
@@ -3392,7 +3524,7 @@
             <a:fld id="{FDF404D0-E306-4E90-90E3-E44D26246FFC}" type="datetime1">
               <a:rPr lang="en-US" smtClean="0"/>
               <a:pPr eaLnBrk="1" latinLnBrk="0" hangingPunct="1"/>
-              <a:t>11/11/2025</a:t>
+              <a:t>11/13/2025</a:t>
             </a:fld>
             <a:endParaRPr lang="en-US"/>
           </a:p>
@@ -3626,7 +3758,7 @@
             <a:fld id="{1485DA14-76F0-4D93-83FB-7878C79A1986}" type="datetime1">
               <a:rPr lang="en-US" smtClean="0"/>
               <a:pPr eaLnBrk="1" latinLnBrk="0" hangingPunct="1"/>
-              <a:t>11/11/2025</a:t>
+              <a:t>11/13/2025</a:t>
             </a:fld>
             <a:endParaRPr lang="en-US"/>
           </a:p>
@@ -3769,7 +3901,7 @@
             <a:fld id="{A15E552D-49E1-496B-B79C-E100986B8B5F}" type="datetime1">
               <a:rPr lang="en-US" smtClean="0"/>
               <a:pPr eaLnBrk="1" latinLnBrk="0" hangingPunct="1"/>
-              <a:t>11/11/2025</a:t>
+              <a:t>11/13/2025</a:t>
             </a:fld>
             <a:endParaRPr lang="en-US"/>
           </a:p>
@@ -4048,7 +4180,7 @@
             <a:fld id="{CEC72505-1551-4A98-97CD-F520B07184AD}" type="datetime1">
               <a:rPr lang="en-US" smtClean="0"/>
               <a:pPr eaLnBrk="1" latinLnBrk="0" hangingPunct="1"/>
-              <a:t>11/11/2025</a:t>
+              <a:t>11/13/2025</a:t>
             </a:fld>
             <a:endParaRPr lang="en-US"/>
           </a:p>
@@ -4456,7 +4588,7 @@
             <a:fld id="{7218F47B-BA16-4F20-B5BA-73F598D94B51}" type="datetime1">
               <a:rPr lang="en-US" smtClean="0"/>
               <a:pPr eaLnBrk="1" latinLnBrk="0" hangingPunct="1"/>
-              <a:t>11/11/2025</a:t>
+              <a:t>11/13/2025</a:t>
             </a:fld>
             <a:endParaRPr lang="en-US"/>
           </a:p>
@@ -4795,7 +4927,7 @@
             <a:fld id="{4F3CB514-9CA6-4E48-9463-A430D31CFDE3}" type="datetime1">
               <a:rPr lang="en-US" smtClean="0"/>
               <a:pPr eaLnBrk="1" latinLnBrk="0" hangingPunct="1"/>
-              <a:t>11/11/2025</a:t>
+              <a:t>11/13/2025</a:t>
             </a:fld>
             <a:endParaRPr lang="en-US" sz="1400" dirty="0">
               <a:solidFill>
@@ -7251,6 +7383,325 @@
   <p:cSld>
     <p:spTree>
       <p:nvGrpSpPr>
+        <p:cNvPr id="1" name="">
+          <a:extLst>
+            <a:ext uri="{FF2B5EF4-FFF2-40B4-BE49-F238E27FC236}">
+              <a16:creationId xmlns:a16="http://schemas.microsoft.com/office/drawing/2014/main" id="{FDB3C34C-8318-37CF-CF5A-C65D4A6D064D}"/>
+            </a:ext>
+          </a:extLst>
+        </p:cNvPr>
+        <p:cNvGrpSpPr/>
+        <p:nvPr/>
+      </p:nvGrpSpPr>
+      <p:grpSpPr>
+        <a:xfrm>
+          <a:off x="0" y="0"/>
+          <a:ext cx="0" cy="0"/>
+          <a:chOff x="0" y="0"/>
+          <a:chExt cx="0" cy="0"/>
+        </a:xfrm>
+      </p:grpSpPr>
+      <p:sp>
+        <p:nvSpPr>
+          <p:cNvPr id="2" name="Title 1">
+            <a:extLst>
+              <a:ext uri="{FF2B5EF4-FFF2-40B4-BE49-F238E27FC236}">
+                <a16:creationId xmlns:a16="http://schemas.microsoft.com/office/drawing/2014/main" id="{286AE22E-7014-BD8E-E9B0-11BB41A135DA}"/>
+              </a:ext>
+            </a:extLst>
+          </p:cNvPr>
+          <p:cNvSpPr>
+            <a:spLocks noGrp="1"/>
+          </p:cNvSpPr>
+          <p:nvPr>
+            <p:ph type="title"/>
+          </p:nvPr>
+        </p:nvSpPr>
+        <p:spPr/>
+        <p:txBody>
+          <a:bodyPr/>
+          <a:lstStyle/>
+          <a:p>
+            <a:r>
+              <a:rPr lang="en-US" dirty="0"/>
+              <a:t>C to Assembly</a:t>
+            </a:r>
+          </a:p>
+        </p:txBody>
+      </p:sp>
+      <p:graphicFrame>
+        <p:nvGraphicFramePr>
+          <p:cNvPr id="5" name="Table 4">
+            <a:extLst>
+              <a:ext uri="{FF2B5EF4-FFF2-40B4-BE49-F238E27FC236}">
+                <a16:creationId xmlns:a16="http://schemas.microsoft.com/office/drawing/2014/main" id="{189D004C-3271-3ECE-4454-851923351400}"/>
+              </a:ext>
+            </a:extLst>
+          </p:cNvPr>
+          <p:cNvGraphicFramePr>
+            <a:graphicFrameLocks noGrp="1"/>
+          </p:cNvGraphicFramePr>
+          <p:nvPr/>
+        </p:nvGraphicFramePr>
+        <p:xfrm>
+          <a:off x="457200" y="1143000"/>
+          <a:ext cx="8458200" cy="1463040"/>
+        </p:xfrm>
+        <a:graphic>
+          <a:graphicData uri="http://schemas.openxmlformats.org/drawingml/2006/table">
+            <a:tbl>
+              <a:tblPr firstRow="1" firstCol="1" bandRow="1">
+                <a:tableStyleId>{5940675A-B579-460E-94D1-54222C63F5DA}</a:tableStyleId>
+              </a:tblPr>
+              <a:tblGrid>
+                <a:gridCol w="2438400">
+                  <a:extLst>
+                    <a:ext uri="{9D8B030D-6E8A-4147-A177-3AD203B41FA5}">
+                      <a16:colId xmlns:a16="http://schemas.microsoft.com/office/drawing/2014/main" val="20000"/>
+                    </a:ext>
+                  </a:extLst>
+                </a:gridCol>
+                <a:gridCol w="6019800">
+                  <a:extLst>
+                    <a:ext uri="{9D8B030D-6E8A-4147-A177-3AD203B41FA5}">
+                      <a16:colId xmlns:a16="http://schemas.microsoft.com/office/drawing/2014/main" val="20001"/>
+                    </a:ext>
+                  </a:extLst>
+                </a:gridCol>
+              </a:tblGrid>
+              <a:tr h="217369">
+                <a:tc>
+                  <a:txBody>
+                    <a:bodyPr/>
+                    <a:lstStyle/>
+                    <a:p>
+                      <a:pPr marL="0" marR="0" algn="just">
+                        <a:spcBef>
+                          <a:spcPts val="0"/>
+                        </a:spcBef>
+                        <a:spcAft>
+                          <a:spcPts val="0"/>
+                        </a:spcAft>
+                      </a:pPr>
+                      <a:r>
+                        <a:rPr lang="en-US" sz="1600" dirty="0">
+                          <a:solidFill>
+                            <a:schemeClr val="bg1"/>
+                          </a:solidFill>
+                          <a:effectLst/>
+                          <a:latin typeface="Consolas" panose="020B0609020204030204" pitchFamily="49" charset="0"/>
+                          <a:cs typeface="Consolas" panose="020B0609020204030204" pitchFamily="49" charset="0"/>
+                        </a:rPr>
+                        <a:t>C Program</a:t>
+                      </a:r>
+                      <a:endParaRPr lang="en-US" sz="1600" dirty="0">
+                        <a:solidFill>
+                          <a:schemeClr val="bg1"/>
+                        </a:solidFill>
+                        <a:effectLst/>
+                        <a:latin typeface="Consolas" panose="020B0609020204030204" pitchFamily="49" charset="0"/>
+                        <a:ea typeface="宋体"/>
+                        <a:cs typeface="Consolas" panose="020B0609020204030204" pitchFamily="49" charset="0"/>
+                      </a:endParaRPr>
+                    </a:p>
+                  </a:txBody>
+                  <a:tcPr marL="68580" marR="68580" marT="0" marB="0">
+                    <a:solidFill>
+                      <a:schemeClr val="accent1"/>
+                    </a:solidFill>
+                  </a:tcPr>
+                </a:tc>
+                <a:tc>
+                  <a:txBody>
+                    <a:bodyPr/>
+                    <a:lstStyle/>
+                    <a:p>
+                      <a:pPr marL="0" marR="0" algn="just">
+                        <a:spcBef>
+                          <a:spcPts val="0"/>
+                        </a:spcBef>
+                        <a:spcAft>
+                          <a:spcPts val="0"/>
+                        </a:spcAft>
+                      </a:pPr>
+                      <a:r>
+                        <a:rPr lang="en-US" sz="1600" dirty="0">
+                          <a:solidFill>
+                            <a:schemeClr val="bg1"/>
+                          </a:solidFill>
+                          <a:effectLst/>
+                          <a:latin typeface="Consolas" panose="020B0609020204030204" pitchFamily="49" charset="0"/>
+                          <a:cs typeface="Consolas" panose="020B0609020204030204" pitchFamily="49" charset="0"/>
+                        </a:rPr>
+                        <a:t>Assembly Program </a:t>
+                      </a:r>
+                      <a:endParaRPr lang="en-US" sz="1600" dirty="0">
+                        <a:solidFill>
+                          <a:schemeClr val="bg1"/>
+                        </a:solidFill>
+                        <a:effectLst/>
+                        <a:latin typeface="Consolas" panose="020B0609020204030204" pitchFamily="49" charset="0"/>
+                        <a:ea typeface="宋体"/>
+                        <a:cs typeface="Consolas" panose="020B0609020204030204" pitchFamily="49" charset="0"/>
+                      </a:endParaRPr>
+                    </a:p>
+                  </a:txBody>
+                  <a:tcPr marL="68580" marR="68580" marT="0" marB="0">
+                    <a:solidFill>
+                      <a:schemeClr val="accent1"/>
+                    </a:solidFill>
+                  </a:tcPr>
+                </a:tc>
+                <a:extLst>
+                  <a:ext uri="{0D108BD9-81ED-4DB2-BD59-A6C34878D82A}">
+                    <a16:rowId xmlns:a16="http://schemas.microsoft.com/office/drawing/2014/main" val="10000"/>
+                  </a:ext>
+                </a:extLst>
+              </a:tr>
+              <a:tr h="773230">
+                <a:tc>
+                  <a:txBody>
+                    <a:bodyPr/>
+                    <a:lstStyle/>
+                    <a:p>
+                      <a:r>
+                        <a:rPr lang="nn-NO" sz="1600" b="0" dirty="0">
+                          <a:effectLst/>
+                          <a:latin typeface="Consolas" panose="020B0609020204030204" pitchFamily="49" charset="0"/>
+                          <a:ea typeface="宋体"/>
+                          <a:cs typeface="Consolas" panose="020B0609020204030204" pitchFamily="49" charset="0"/>
+                        </a:rPr>
+                        <a:t>int i;</a:t>
+                      </a:r>
+                    </a:p>
+                    <a:p>
+                      <a:r>
+                        <a:rPr lang="nn-NO" sz="1600" b="0" dirty="0">
+                          <a:effectLst/>
+                          <a:latin typeface="Consolas" panose="020B0609020204030204" pitchFamily="49" charset="0"/>
+                          <a:ea typeface="宋体"/>
+                          <a:cs typeface="Consolas" panose="020B0609020204030204" pitchFamily="49" charset="0"/>
+                        </a:rPr>
+                        <a:t>int sum = 0;</a:t>
+                      </a:r>
+                    </a:p>
+                    <a:p>
+                      <a:r>
+                        <a:rPr lang="nn-NO" sz="1600" b="0" dirty="0">
+                          <a:effectLst/>
+                          <a:latin typeface="Consolas" panose="020B0609020204030204" pitchFamily="49" charset="0"/>
+                          <a:ea typeface="宋体"/>
+                          <a:cs typeface="Consolas" panose="020B0609020204030204" pitchFamily="49" charset="0"/>
+                        </a:rPr>
+                        <a:t>for (i = </a:t>
+                      </a:r>
+                      <a:r>
+                        <a:rPr lang="en-US" altLang="zh-CN" sz="1600" b="0" dirty="0">
+                          <a:effectLst/>
+                          <a:latin typeface="Consolas" panose="020B0609020204030204" pitchFamily="49" charset="0"/>
+                          <a:ea typeface="宋体"/>
+                          <a:cs typeface="Consolas" panose="020B0609020204030204" pitchFamily="49" charset="0"/>
+                        </a:rPr>
+                        <a:t>1</a:t>
+                      </a:r>
+                      <a:r>
+                        <a:rPr lang="nn-NO" sz="1600" b="0" dirty="0">
+                          <a:effectLst/>
+                          <a:latin typeface="Consolas" panose="020B0609020204030204" pitchFamily="49" charset="0"/>
+                          <a:ea typeface="宋体"/>
+                          <a:cs typeface="Consolas" panose="020B0609020204030204" pitchFamily="49" charset="0"/>
+                        </a:rPr>
+                        <a:t>; i &lt;</a:t>
+                      </a:r>
+                      <a:r>
+                        <a:rPr lang="en-US" sz="1600" b="0" dirty="0">
+                          <a:effectLst/>
+                          <a:latin typeface="Consolas" panose="020B0609020204030204" pitchFamily="49" charset="0"/>
+                          <a:ea typeface="宋体"/>
+                          <a:cs typeface="Consolas" panose="020B0609020204030204" pitchFamily="49" charset="0"/>
+                        </a:rPr>
+                        <a:t>=</a:t>
+                      </a:r>
+                      <a:r>
+                        <a:rPr lang="nn-NO" sz="1600" b="0" dirty="0">
+                          <a:effectLst/>
+                          <a:latin typeface="Consolas" panose="020B0609020204030204" pitchFamily="49" charset="0"/>
+                          <a:ea typeface="宋体"/>
+                          <a:cs typeface="Consolas" panose="020B0609020204030204" pitchFamily="49" charset="0"/>
+                        </a:rPr>
+                        <a:t> 22; i++)</a:t>
+                      </a:r>
+                    </a:p>
+                    <a:p>
+                      <a:r>
+                        <a:rPr lang="nn-NO" sz="1600" b="0" dirty="0">
+                          <a:effectLst/>
+                          <a:latin typeface="Consolas" panose="020B0609020204030204" pitchFamily="49" charset="0"/>
+                          <a:ea typeface="宋体"/>
+                          <a:cs typeface="Consolas" panose="020B0609020204030204" pitchFamily="49" charset="0"/>
+                        </a:rPr>
+                        <a:t>  sum += i;</a:t>
+                      </a:r>
+                      <a:endParaRPr lang="en-US" sz="1600" b="0" dirty="0">
+                        <a:effectLst/>
+                        <a:latin typeface="Consolas" panose="020B0609020204030204" pitchFamily="49" charset="0"/>
+                        <a:ea typeface="宋体"/>
+                        <a:cs typeface="Consolas" panose="020B0609020204030204" pitchFamily="49" charset="0"/>
+                      </a:endParaRPr>
+                    </a:p>
+                  </a:txBody>
+                  <a:tcPr marL="68580" marR="68580" marT="0" marB="0"/>
+                </a:tc>
+                <a:tc>
+                  <a:txBody>
+                    <a:bodyPr/>
+                    <a:lstStyle/>
+                    <a:p>
+                      <a:pPr marL="0" marR="0" algn="just">
+                        <a:spcBef>
+                          <a:spcPts val="0"/>
+                        </a:spcBef>
+                        <a:spcAft>
+                          <a:spcPts val="0"/>
+                        </a:spcAft>
+                      </a:pPr>
+                      <a:endParaRPr lang="pt-BR" sz="1600" i="0" dirty="0">
+                        <a:effectLst/>
+                        <a:latin typeface="Consolas" panose="020B0609020204030204" pitchFamily="49" charset="0"/>
+                        <a:cs typeface="Consolas" panose="020B0609020204030204" pitchFamily="49" charset="0"/>
+                      </a:endParaRPr>
+                    </a:p>
+                  </a:txBody>
+                  <a:tcPr marL="68580" marR="68580" marT="0" marB="0"/>
+                </a:tc>
+                <a:extLst>
+                  <a:ext uri="{0D108BD9-81ED-4DB2-BD59-A6C34878D82A}">
+                    <a16:rowId xmlns:a16="http://schemas.microsoft.com/office/drawing/2014/main" val="10001"/>
+                  </a:ext>
+                </a:extLst>
+              </a:tr>
+            </a:tbl>
+          </a:graphicData>
+        </a:graphic>
+      </p:graphicFrame>
+    </p:spTree>
+    <p:extLst>
+      <p:ext uri="{BB962C8B-B14F-4D97-AF65-F5344CB8AC3E}">
+        <p14:creationId xmlns:p14="http://schemas.microsoft.com/office/powerpoint/2010/main" val="2076517291"/>
+      </p:ext>
+    </p:extLst>
+  </p:cSld>
+  <p:clrMapOvr>
+    <a:masterClrMapping/>
+  </p:clrMapOvr>
+</p:sld>
+</file>
+
+<file path=ppt/slides/slide14.xml><?xml version="1.0" encoding="utf-8"?>
+<p:sld xmlns:a="http://schemas.openxmlformats.org/drawingml/2006/main" xmlns:r="http://schemas.openxmlformats.org/officeDocument/2006/relationships" xmlns:p="http://schemas.openxmlformats.org/presentationml/2006/main">
+  <p:cSld>
+    <p:spTree>
+      <p:nvGrpSpPr>
         <p:cNvPr id="1" name=""/>
         <p:cNvGrpSpPr/>
         <p:nvPr/>
@@ -7315,7 +7766,7 @@
             <a:fld id="{EA7C8D44-3667-46F6-9772-CC52308E2A7F}" type="slidenum">
               <a:rPr kumimoji="0" lang="en-US" smtClean="0"/>
               <a:pPr/>
-              <a:t>13</a:t>
+              <a:t>14</a:t>
             </a:fld>
             <a:endParaRPr kumimoji="0" lang="en-US" dirty="0"/>
           </a:p>
@@ -7369,7 +7820,7 @@
 </p:sld>
 </file>
 
-<file path=ppt/slides/slide14.xml><?xml version="1.0" encoding="utf-8"?>
+<file path=ppt/slides/slide15.xml><?xml version="1.0" encoding="utf-8"?>
 <p:sld xmlns:a="http://schemas.openxmlformats.org/drawingml/2006/main" xmlns:r="http://schemas.openxmlformats.org/officeDocument/2006/relationships" xmlns:p="http://schemas.openxmlformats.org/presentationml/2006/main">
   <p:cSld>
     <p:spTree>
@@ -7438,7 +7889,7 @@
             <a:fld id="{EA7C8D44-3667-46F6-9772-CC52308E2A7F}" type="slidenum">
               <a:rPr kumimoji="0" lang="en-US" smtClean="0"/>
               <a:pPr/>
-              <a:t>14</a:t>
+              <a:t>15</a:t>
             </a:fld>
             <a:endParaRPr kumimoji="0" lang="en-US" dirty="0"/>
           </a:p>
@@ -7490,7 +7941,7 @@
 </p:sld>
 </file>
 
-<file path=ppt/slides/slide15.xml><?xml version="1.0" encoding="utf-8"?>
+<file path=ppt/slides/slide16.xml><?xml version="1.0" encoding="utf-8"?>
 <p:sld xmlns:a="http://schemas.openxmlformats.org/drawingml/2006/main" xmlns:r="http://schemas.openxmlformats.org/officeDocument/2006/relationships" xmlns:p="http://schemas.openxmlformats.org/presentationml/2006/main">
   <p:cSld>
     <p:spTree>
@@ -7561,7 +8012,7 @@
             <a:fld id="{AEE14D4A-FE32-40AF-B06D-E9622816B101}" type="slidenum">
               <a:rPr lang="en-US" smtClean="0"/>
               <a:pPr/>
-              <a:t>15</a:t>
+              <a:t>16</a:t>
             </a:fld>
             <a:endParaRPr lang="en-US"/>
           </a:p>
@@ -10196,7 +10647,7 @@
 </p:sld>
 </file>
 
-<file path=ppt/slides/slide16.xml><?xml version="1.0" encoding="utf-8"?>
+<file path=ppt/slides/slide17.xml><?xml version="1.0" encoding="utf-8"?>
 <p:sld xmlns:a="http://schemas.openxmlformats.org/drawingml/2006/main" xmlns:r="http://schemas.openxmlformats.org/officeDocument/2006/relationships" xmlns:p="http://schemas.openxmlformats.org/presentationml/2006/main">
   <p:cSld>
     <p:spTree>
@@ -10271,7 +10722,7 @@
             <a:fld id="{EA7C8D44-3667-46F6-9772-CC52308E2A7F}" type="slidenum">
               <a:rPr kumimoji="0" lang="en-US" smtClean="0"/>
               <a:pPr/>
-              <a:t>16</a:t>
+              <a:t>17</a:t>
             </a:fld>
             <a:endParaRPr kumimoji="0" lang="en-US" dirty="0"/>
           </a:p>
@@ -10344,7 +10795,7 @@
 </p:sld>
 </file>
 
-<file path=ppt/slides/slide17.xml><?xml version="1.0" encoding="utf-8"?>
+<file path=ppt/slides/slide18.xml><?xml version="1.0" encoding="utf-8"?>
 <p:sld xmlns:a="http://schemas.openxmlformats.org/drawingml/2006/main" xmlns:r="http://schemas.openxmlformats.org/officeDocument/2006/relationships" xmlns:p="http://schemas.openxmlformats.org/presentationml/2006/main">
   <p:cSld>
     <p:spTree>
@@ -10413,7 +10864,7 @@
             <a:fld id="{EA7C8D44-3667-46F6-9772-CC52308E2A7F}" type="slidenum">
               <a:rPr kumimoji="0" lang="en-US" smtClean="0"/>
               <a:pPr/>
-              <a:t>17</a:t>
+              <a:t>18</a:t>
             </a:fld>
             <a:endParaRPr kumimoji="0" lang="en-US" dirty="0"/>
           </a:p>
@@ -11386,7 +11837,7 @@
 </p:sld>
 </file>
 
-<file path=ppt/slides/slide18.xml><?xml version="1.0" encoding="utf-8"?>
+<file path=ppt/slides/slide19.xml><?xml version="1.0" encoding="utf-8"?>
 <p:sld xmlns:a="http://schemas.openxmlformats.org/drawingml/2006/main" xmlns:r="http://schemas.openxmlformats.org/officeDocument/2006/relationships" xmlns:p="http://schemas.openxmlformats.org/presentationml/2006/main">
   <p:cSld>
     <p:spTree>
@@ -11461,7 +11912,7 @@
             <a:fld id="{EA7C8D44-3667-46F6-9772-CC52308E2A7F}" type="slidenum">
               <a:rPr kumimoji="0" lang="en-US" smtClean="0"/>
               <a:pPr/>
-              <a:t>18</a:t>
+              <a:t>19</a:t>
             </a:fld>
             <a:endParaRPr kumimoji="0" lang="en-US" dirty="0"/>
           </a:p>
